--- a/Proyecto_Fin_Modulo_ML/docs/Presentacion_ML.pptx
+++ b/Proyecto_Fin_Modulo_ML/docs/Presentacion_ML.pptx
@@ -288,7 +288,7 @@
           <a:p>
             <a:fld id="{6FBDE120-9F22-4518-84BC-BE7A9B7F4923}" type="datetimeFigureOut">
               <a:rPr lang="es-ES" smtClean="0"/>
-              <a:t>10/09/2025</a:t>
+              <a:t>11/09/2025</a:t>
             </a:fld>
             <a:endParaRPr lang="es-ES"/>
           </a:p>
@@ -486,7 +486,7 @@
           <a:p>
             <a:fld id="{6FBDE120-9F22-4518-84BC-BE7A9B7F4923}" type="datetimeFigureOut">
               <a:rPr lang="es-ES" smtClean="0"/>
-              <a:t>10/09/2025</a:t>
+              <a:t>11/09/2025</a:t>
             </a:fld>
             <a:endParaRPr lang="es-ES"/>
           </a:p>
@@ -694,7 +694,7 @@
           <a:p>
             <a:fld id="{6FBDE120-9F22-4518-84BC-BE7A9B7F4923}" type="datetimeFigureOut">
               <a:rPr lang="es-ES" smtClean="0"/>
-              <a:t>10/09/2025</a:t>
+              <a:t>11/09/2025</a:t>
             </a:fld>
             <a:endParaRPr lang="es-ES"/>
           </a:p>
@@ -892,7 +892,7 @@
           <a:p>
             <a:fld id="{6FBDE120-9F22-4518-84BC-BE7A9B7F4923}" type="datetimeFigureOut">
               <a:rPr lang="es-ES" smtClean="0"/>
-              <a:t>10/09/2025</a:t>
+              <a:t>11/09/2025</a:t>
             </a:fld>
             <a:endParaRPr lang="es-ES"/>
           </a:p>
@@ -1167,7 +1167,7 @@
           <a:p>
             <a:fld id="{6FBDE120-9F22-4518-84BC-BE7A9B7F4923}" type="datetimeFigureOut">
               <a:rPr lang="es-ES" smtClean="0"/>
-              <a:t>10/09/2025</a:t>
+              <a:t>11/09/2025</a:t>
             </a:fld>
             <a:endParaRPr lang="es-ES"/>
           </a:p>
@@ -1432,7 +1432,7 @@
           <a:p>
             <a:fld id="{6FBDE120-9F22-4518-84BC-BE7A9B7F4923}" type="datetimeFigureOut">
               <a:rPr lang="es-ES" smtClean="0"/>
-              <a:t>10/09/2025</a:t>
+              <a:t>11/09/2025</a:t>
             </a:fld>
             <a:endParaRPr lang="es-ES"/>
           </a:p>
@@ -1844,7 +1844,7 @@
           <a:p>
             <a:fld id="{6FBDE120-9F22-4518-84BC-BE7A9B7F4923}" type="datetimeFigureOut">
               <a:rPr lang="es-ES" smtClean="0"/>
-              <a:t>10/09/2025</a:t>
+              <a:t>11/09/2025</a:t>
             </a:fld>
             <a:endParaRPr lang="es-ES"/>
           </a:p>
@@ -1985,7 +1985,7 @@
           <a:p>
             <a:fld id="{6FBDE120-9F22-4518-84BC-BE7A9B7F4923}" type="datetimeFigureOut">
               <a:rPr lang="es-ES" smtClean="0"/>
-              <a:t>10/09/2025</a:t>
+              <a:t>11/09/2025</a:t>
             </a:fld>
             <a:endParaRPr lang="es-ES"/>
           </a:p>
@@ -2098,7 +2098,7 @@
           <a:p>
             <a:fld id="{6FBDE120-9F22-4518-84BC-BE7A9B7F4923}" type="datetimeFigureOut">
               <a:rPr lang="es-ES" smtClean="0"/>
-              <a:t>10/09/2025</a:t>
+              <a:t>11/09/2025</a:t>
             </a:fld>
             <a:endParaRPr lang="es-ES"/>
           </a:p>
@@ -2409,7 +2409,7 @@
           <a:p>
             <a:fld id="{6FBDE120-9F22-4518-84BC-BE7A9B7F4923}" type="datetimeFigureOut">
               <a:rPr lang="es-ES" smtClean="0"/>
-              <a:t>10/09/2025</a:t>
+              <a:t>11/09/2025</a:t>
             </a:fld>
             <a:endParaRPr lang="es-ES"/>
           </a:p>
@@ -2697,7 +2697,7 @@
           <a:p>
             <a:fld id="{6FBDE120-9F22-4518-84BC-BE7A9B7F4923}" type="datetimeFigureOut">
               <a:rPr lang="es-ES" smtClean="0"/>
-              <a:t>10/09/2025</a:t>
+              <a:t>11/09/2025</a:t>
             </a:fld>
             <a:endParaRPr lang="es-ES"/>
           </a:p>
@@ -2938,7 +2938,7 @@
           <a:p>
             <a:fld id="{6FBDE120-9F22-4518-84BC-BE7A9B7F4923}" type="datetimeFigureOut">
               <a:rPr lang="es-ES" smtClean="0"/>
-              <a:t>10/09/2025</a:t>
+              <a:t>11/09/2025</a:t>
             </a:fld>
             <a:endParaRPr lang="es-ES"/>
           </a:p>
@@ -3961,14 +3961,14 @@
           <p:nvPr>
             <p:extLst>
               <p:ext uri="{D42A27DB-BD31-4B8C-83A1-F6EECF244321}">
-                <p14:modId xmlns:p14="http://schemas.microsoft.com/office/powerpoint/2010/main" val="1099878041"/>
+                <p14:modId xmlns:p14="http://schemas.microsoft.com/office/powerpoint/2010/main" val="3665288204"/>
               </p:ext>
             </p:extLst>
           </p:nvPr>
         </p:nvGraphicFramePr>
         <p:xfrm>
           <a:off x="369841" y="2085018"/>
-          <a:ext cx="11622782" cy="2848984"/>
+          <a:ext cx="11622782" cy="2790776"/>
         </p:xfrm>
         <a:graphic>
           <a:graphicData uri="http://schemas.openxmlformats.org/drawingml/2006/table">
@@ -4221,7 +4221,7 @@
                       <a:pPr algn="ctr"/>
                       <a:r>
                         <a:rPr lang="es-ES" sz="1500" dirty="0"/>
-                        <a:t>0,84</a:t>
+                        <a:t>0,835</a:t>
                       </a:r>
                     </a:p>
                   </a:txBody>
@@ -4356,7 +4356,7 @@
                       <a:pPr algn="ctr"/>
                       <a:r>
                         <a:rPr lang="es-ES" sz="1500" dirty="0"/>
-                        <a:t>0,70</a:t>
+                        <a:t>0,71</a:t>
                       </a:r>
                     </a:p>
                   </a:txBody>
@@ -4424,12 +4424,8 @@
                     <a:lstStyle/>
                     <a:p>
                       <a:r>
-                        <a:rPr lang="es-ES" sz="1500" dirty="0" err="1"/>
-                        <a:t>Lgran</a:t>
-                      </a:r>
-                      <a:r>
                         <a:rPr lang="es-ES" sz="1500" dirty="0"/>
-                        <a:t> mejora en “Yes” pero con caída fuerte en “No” así como en la exactitud global</a:t>
+                        <a:t>Gran mejora en “Yes” pero con caída fuerte en “No” así como en la exactitud global</a:t>
                       </a:r>
                     </a:p>
                   </a:txBody>
@@ -4472,7 +4468,7 @@
                       <a:pPr algn="ctr"/>
                       <a:r>
                         <a:rPr lang="es-ES" sz="1500" dirty="0"/>
-                        <a:t>0,78</a:t>
+                        <a:t>0,77</a:t>
                       </a:r>
                     </a:p>
                   </a:txBody>
@@ -4486,7 +4482,7 @@
                       <a:pPr algn="ctr"/>
                       <a:r>
                         <a:rPr lang="es-ES" sz="1500" dirty="0"/>
-                        <a:t>0,81</a:t>
+                        <a:t>0,85</a:t>
                       </a:r>
                     </a:p>
                   </a:txBody>
@@ -4671,7 +4667,7 @@
                       <a:pPr algn="ctr"/>
                       <a:r>
                         <a:rPr lang="es-ES" sz="1500" dirty="0"/>
-                        <a:t>0,81</a:t>
+                        <a:t>0,80</a:t>
                       </a:r>
                     </a:p>
                   </a:txBody>
@@ -4684,13 +4680,8 @@
                     <a:p>
                       <a:r>
                         <a:rPr lang="es-ES" sz="1500" dirty="0"/>
-                        <a:t>Mejor detección de “Yes”. Baja </a:t>
-                      </a:r>
-                      <a:r>
-                        <a:rPr lang="es-ES" sz="1500" dirty="0" err="1"/>
-                        <a:t>accuracy</a:t>
-                      </a:r>
-                      <a:endParaRPr lang="es-ES" sz="1500" dirty="0"/>
+                        <a:t>No hay cambios</a:t>
+                      </a:r>
                     </a:p>
                   </a:txBody>
                   <a:tcPr/>
@@ -5707,14 +5698,14 @@
           <p:nvPr>
             <p:extLst>
               <p:ext uri="{D42A27DB-BD31-4B8C-83A1-F6EECF244321}">
-                <p14:modId xmlns:p14="http://schemas.microsoft.com/office/powerpoint/2010/main" val="4186060533"/>
+                <p14:modId xmlns:p14="http://schemas.microsoft.com/office/powerpoint/2010/main" val="2648081014"/>
               </p:ext>
             </p:extLst>
           </p:nvPr>
         </p:nvGraphicFramePr>
         <p:xfrm>
           <a:off x="442531" y="2344040"/>
-          <a:ext cx="11492830" cy="3854158"/>
+          <a:ext cx="11492830" cy="3335998"/>
         </p:xfrm>
         <a:graphic>
           <a:graphicData uri="http://schemas.openxmlformats.org/drawingml/2006/table">
@@ -6016,7 +6007,7 @@
                       <a:pPr algn="ctr"/>
                       <a:r>
                         <a:rPr lang="es-ES" sz="1400" dirty="0"/>
-                        <a:t>0.50</a:t>
+                        <a:t>0,50</a:t>
                       </a:r>
                     </a:p>
                   </a:txBody>
@@ -6044,7 +6035,7 @@
                       <a:pPr algn="ctr"/>
                       <a:r>
                         <a:rPr lang="es-ES" sz="1400" dirty="0"/>
-                        <a:t>0,75</a:t>
+                        <a:t>0,74</a:t>
                       </a:r>
                     </a:p>
                   </a:txBody>
@@ -6155,7 +6146,7 @@
                       <a:pPr algn="ctr"/>
                       <a:r>
                         <a:rPr lang="es-ES" sz="1400" dirty="0"/>
-                        <a:t>0,77</a:t>
+                        <a:t>0,58</a:t>
                       </a:r>
                     </a:p>
                   </a:txBody>
@@ -6224,7 +6215,7 @@
                     <a:p>
                       <a:r>
                         <a:rPr lang="es-ES" sz="1400" dirty="0"/>
-                        <a:t>Mejora de detección de “No” gracias a SMOTE y </a:t>
+                        <a:t>Mejora de marginal de “No” gracias a SMOTE y </a:t>
                       </a:r>
                       <a:r>
                         <a:rPr lang="es-ES" sz="1400" dirty="0" err="1"/>
@@ -6256,8 +6247,13 @@
                       </a:r>
                       <a:r>
                         <a:rPr lang="es-ES" sz="1400" dirty="0"/>
-                        <a:t> Base</a:t>
-                      </a:r>
+                        <a:t> </a:t>
+                      </a:r>
+                      <a:r>
+                        <a:rPr lang="es-ES" sz="1400" dirty="0" err="1"/>
+                        <a:t>GridSearch</a:t>
+                      </a:r>
+                      <a:endParaRPr lang="es-ES" sz="1400" dirty="0"/>
                     </a:p>
                   </a:txBody>
                   <a:tcPr>
@@ -6277,7 +6273,7 @@
                       <a:pPr algn="ctr"/>
                       <a:r>
                         <a:rPr lang="es-ES" sz="1400" dirty="0"/>
-                        <a:t>0,84</a:t>
+                        <a:t>0,986</a:t>
                       </a:r>
                     </a:p>
                   </a:txBody>
@@ -6298,7 +6294,7 @@
                       <a:pPr algn="ctr"/>
                       <a:r>
                         <a:rPr lang="es-ES" sz="1400" dirty="0"/>
-                        <a:t>0,90</a:t>
+                        <a:t>0,99</a:t>
                       </a:r>
                     </a:p>
                   </a:txBody>
@@ -6319,7 +6315,7 @@
                       <a:pPr algn="ctr"/>
                       <a:r>
                         <a:rPr lang="es-ES" sz="1400" dirty="0"/>
-                        <a:t>0,08</a:t>
+                        <a:t>0,63</a:t>
                       </a:r>
                     </a:p>
                   </a:txBody>
@@ -6340,7 +6336,7 @@
                       <a:pPr algn="ctr"/>
                       <a:r>
                         <a:rPr lang="es-ES" sz="1400" dirty="0"/>
-                        <a:t>1</a:t>
+                        <a:t>0,46</a:t>
                       </a:r>
                     </a:p>
                   </a:txBody>
@@ -6361,7 +6357,7 @@
                       <a:pPr algn="ctr"/>
                       <a:r>
                         <a:rPr lang="es-ES" sz="1400" dirty="0"/>
-                        <a:t>0,04</a:t>
+                        <a:t>0,81</a:t>
                       </a:r>
                     </a:p>
                   </a:txBody>
@@ -6382,7 +6378,7 @@
                       <a:pPr algn="ctr"/>
                       <a:r>
                         <a:rPr lang="es-ES" sz="1400" dirty="0"/>
-                        <a:t>0,66</a:t>
+                        <a:t>0,73</a:t>
                       </a:r>
                     </a:p>
                   </a:txBody>
@@ -6403,7 +6399,7 @@
                       <a:pPr algn="ctr"/>
                       <a:r>
                         <a:rPr lang="es-ES" sz="1400" dirty="0"/>
-                        <a:t>0,81</a:t>
+                        <a:t>0,92</a:t>
                       </a:r>
                     </a:p>
                   </a:txBody>
@@ -6423,7 +6419,7 @@
                     <a:p>
                       <a:r>
                         <a:rPr lang="es-ES" sz="1400" dirty="0"/>
-                        <a:t>Excelente en mayoritaria, ignora minoritaria</a:t>
+                        <a:t>Excelente en mayoritaria, falla algo en la minoritaria</a:t>
                       </a:r>
                     </a:p>
                   </a:txBody>
@@ -6496,7 +6492,7 @@
                       <a:pPr algn="ctr"/>
                       <a:r>
                         <a:rPr lang="es-ES" sz="1400" dirty="0"/>
-                        <a:t>0,74</a:t>
+                        <a:t>0,94</a:t>
                       </a:r>
                     </a:p>
                   </a:txBody>
@@ -6517,7 +6513,7 @@
                       <a:pPr algn="ctr"/>
                       <a:r>
                         <a:rPr lang="es-ES" sz="1400" dirty="0"/>
-                        <a:t>0,34</a:t>
+                        <a:t>0,24</a:t>
                       </a:r>
                     </a:p>
                   </a:txBody>
@@ -6538,7 +6534,7 @@
                       <a:pPr algn="ctr"/>
                       <a:r>
                         <a:rPr lang="es-ES" sz="1400" dirty="0"/>
-                        <a:t>1</a:t>
+                        <a:t>0,67</a:t>
                       </a:r>
                     </a:p>
                   </a:txBody>
@@ -6559,7 +6555,7 @@
                       <a:pPr algn="ctr"/>
                       <a:r>
                         <a:rPr lang="es-ES" sz="1400" dirty="0"/>
-                        <a:t>0,54</a:t>
+                        <a:t>0,59</a:t>
                       </a:r>
                     </a:p>
                   </a:txBody>
@@ -6580,7 +6576,7 @@
                       <a:pPr algn="ctr"/>
                       <a:r>
                         <a:rPr lang="es-ES" sz="1400" dirty="0"/>
-                        <a:t>0,68</a:t>
+                        <a:t>0,79</a:t>
                       </a:r>
                     </a:p>
                   </a:txBody>
@@ -6601,7 +6597,7 @@
                       <a:pPr algn="ctr"/>
                       <a:r>
                         <a:rPr lang="es-ES" sz="1400" dirty="0"/>
-                        <a:t>0,81</a:t>
+                        <a:t>0,90</a:t>
                       </a:r>
                     </a:p>
                   </a:txBody>
@@ -6629,7 +6625,15 @@
                       </a:r>
                       <a:r>
                         <a:rPr lang="es-ES" sz="1400" dirty="0"/>
-                        <a:t> de no</a:t>
+                        <a:t> de no (</a:t>
+                      </a:r>
+                      <a:r>
+                        <a:rPr lang="es-ES" sz="1400" dirty="0" err="1"/>
+                        <a:t>sobreprediccion</a:t>
+                      </a:r>
+                      <a:r>
+                        <a:rPr lang="es-ES" sz="1400" dirty="0"/>
+                        <a:t>)</a:t>
                       </a:r>
                     </a:p>
                   </a:txBody>
@@ -6660,209 +6664,6 @@
                       </a:r>
                       <a:r>
                         <a:rPr lang="es-ES" sz="1400" dirty="0"/>
-                        <a:t> </a:t>
-                      </a:r>
-                      <a:r>
-                        <a:rPr lang="es-ES" sz="1400" dirty="0" err="1"/>
-                        <a:t>GridSearch</a:t>
-                      </a:r>
-                      <a:endParaRPr lang="es-ES" sz="1400" dirty="0"/>
-                    </a:p>
-                  </a:txBody>
-                  <a:tcPr>
-                    <a:solidFill>
-                      <a:schemeClr val="accent6">
-                        <a:lumMod val="40000"/>
-                        <a:lumOff val="60000"/>
-                      </a:schemeClr>
-                    </a:solidFill>
-                  </a:tcPr>
-                </a:tc>
-                <a:tc>
-                  <a:txBody>
-                    <a:bodyPr/>
-                    <a:lstStyle/>
-                    <a:p>
-                      <a:pPr algn="ctr"/>
-                      <a:r>
-                        <a:rPr lang="es-ES" sz="1400" dirty="0"/>
-                        <a:t>0,78</a:t>
-                      </a:r>
-                    </a:p>
-                  </a:txBody>
-                  <a:tcPr>
-                    <a:solidFill>
-                      <a:schemeClr val="accent6">
-                        <a:lumMod val="40000"/>
-                        <a:lumOff val="60000"/>
-                      </a:schemeClr>
-                    </a:solidFill>
-                  </a:tcPr>
-                </a:tc>
-                <a:tc>
-                  <a:txBody>
-                    <a:bodyPr/>
-                    <a:lstStyle/>
-                    <a:p>
-                      <a:pPr algn="ctr"/>
-                      <a:r>
-                        <a:rPr lang="es-ES" sz="1400" dirty="0"/>
-                        <a:t>0,85</a:t>
-                      </a:r>
-                    </a:p>
-                  </a:txBody>
-                  <a:tcPr>
-                    <a:solidFill>
-                      <a:schemeClr val="accent6">
-                        <a:lumMod val="40000"/>
-                        <a:lumOff val="60000"/>
-                      </a:schemeClr>
-                    </a:solidFill>
-                  </a:tcPr>
-                </a:tc>
-                <a:tc>
-                  <a:txBody>
-                    <a:bodyPr/>
-                    <a:lstStyle/>
-                    <a:p>
-                      <a:pPr algn="ctr"/>
-                      <a:r>
-                        <a:rPr lang="es-ES" sz="1400" dirty="0"/>
-                        <a:t>0,26</a:t>
-                      </a:r>
-                    </a:p>
-                  </a:txBody>
-                  <a:tcPr>
-                    <a:solidFill>
-                      <a:schemeClr val="accent6">
-                        <a:lumMod val="40000"/>
-                        <a:lumOff val="60000"/>
-                      </a:schemeClr>
-                    </a:solidFill>
-                  </a:tcPr>
-                </a:tc>
-                <a:tc>
-                  <a:txBody>
-                    <a:bodyPr/>
-                    <a:lstStyle/>
-                    <a:p>
-                      <a:pPr algn="ctr"/>
-                      <a:r>
-                        <a:rPr lang="es-ES" sz="1400" dirty="0"/>
-                        <a:t>1</a:t>
-                      </a:r>
-                    </a:p>
-                  </a:txBody>
-                  <a:tcPr>
-                    <a:solidFill>
-                      <a:schemeClr val="accent6">
-                        <a:lumMod val="40000"/>
-                        <a:lumOff val="60000"/>
-                      </a:schemeClr>
-                    </a:solidFill>
-                  </a:tcPr>
-                </a:tc>
-                <a:tc>
-                  <a:txBody>
-                    <a:bodyPr/>
-                    <a:lstStyle/>
-                    <a:p>
-                      <a:pPr algn="ctr"/>
-                      <a:r>
-                        <a:rPr lang="es-ES" sz="1400" dirty="0"/>
-                        <a:t>0,23</a:t>
-                      </a:r>
-                    </a:p>
-                  </a:txBody>
-                  <a:tcPr>
-                    <a:solidFill>
-                      <a:schemeClr val="accent6">
-                        <a:lumMod val="40000"/>
-                        <a:lumOff val="60000"/>
-                      </a:schemeClr>
-                    </a:solidFill>
-                  </a:tcPr>
-                </a:tc>
-                <a:tc>
-                  <a:txBody>
-                    <a:bodyPr/>
-                    <a:lstStyle/>
-                    <a:p>
-                      <a:pPr algn="ctr"/>
-                      <a:r>
-                        <a:rPr lang="es-ES" sz="1400" dirty="0"/>
-                        <a:t>0,70</a:t>
-                      </a:r>
-                    </a:p>
-                  </a:txBody>
-                  <a:tcPr>
-                    <a:solidFill>
-                      <a:schemeClr val="accent6">
-                        <a:lumMod val="40000"/>
-                        <a:lumOff val="60000"/>
-                      </a:schemeClr>
-                    </a:solidFill>
-                  </a:tcPr>
-                </a:tc>
-                <a:tc>
-                  <a:txBody>
-                    <a:bodyPr/>
-                    <a:lstStyle/>
-                    <a:p>
-                      <a:pPr algn="ctr"/>
-                      <a:r>
-                        <a:rPr lang="es-ES" sz="1400" dirty="0"/>
-                        <a:t>0,81</a:t>
-                      </a:r>
-                    </a:p>
-                  </a:txBody>
-                  <a:tcPr>
-                    <a:solidFill>
-                      <a:schemeClr val="accent6">
-                        <a:lumMod val="40000"/>
-                        <a:lumOff val="60000"/>
-                      </a:schemeClr>
-                    </a:solidFill>
-                  </a:tcPr>
-                </a:tc>
-                <a:tc>
-                  <a:txBody>
-                    <a:bodyPr/>
-                    <a:lstStyle/>
-                    <a:p>
-                      <a:r>
-                        <a:rPr lang="es-ES" sz="1400" dirty="0"/>
-                        <a:t>Mas balanceada, clase minoritaria detectada sin comprometer tanto “No”</a:t>
-                      </a:r>
-                    </a:p>
-                  </a:txBody>
-                  <a:tcPr>
-                    <a:solidFill>
-                      <a:schemeClr val="accent6">
-                        <a:lumMod val="40000"/>
-                        <a:lumOff val="60000"/>
-                      </a:schemeClr>
-                    </a:solidFill>
-                  </a:tcPr>
-                </a:tc>
-                <a:extLst>
-                  <a:ext uri="{0D108BD9-81ED-4DB2-BD59-A6C34878D82A}">
-                    <a16:rowId xmlns:a16="http://schemas.microsoft.com/office/drawing/2014/main" val="871589251"/>
-                  </a:ext>
-                </a:extLst>
-              </a:tr>
-              <a:tr h="490432">
-                <a:tc>
-                  <a:txBody>
-                    <a:bodyPr/>
-                    <a:lstStyle/>
-                    <a:p>
-                      <a:r>
-                        <a:rPr lang="es-ES" sz="1400" dirty="0" err="1"/>
-                        <a:t>XGBoost</a:t>
-                      </a:r>
-                      <a:r>
-                        <a:rPr lang="es-ES" sz="1400" dirty="0"/>
                         <a:t> + </a:t>
                       </a:r>
                       <a:r>
@@ -6892,7 +6693,7 @@
                       <a:pPr algn="ctr"/>
                       <a:r>
                         <a:rPr lang="es-ES" sz="1400" dirty="0"/>
-                        <a:t>0,76</a:t>
+                        <a:t>0,986</a:t>
                       </a:r>
                     </a:p>
                   </a:txBody>
@@ -6913,7 +6714,7 @@
                       <a:pPr algn="ctr"/>
                       <a:r>
                         <a:rPr lang="es-ES" sz="1400" dirty="0"/>
-                        <a:t>0,84</a:t>
+                        <a:t>0,99</a:t>
                       </a:r>
                     </a:p>
                   </a:txBody>
@@ -6934,7 +6735,7 @@
                       <a:pPr algn="ctr"/>
                       <a:r>
                         <a:rPr lang="es-ES" sz="1400" dirty="0"/>
-                        <a:t>0,26</a:t>
+                        <a:t>0,63</a:t>
                       </a:r>
                     </a:p>
                   </a:txBody>
@@ -6955,7 +6756,7 @@
                       <a:pPr algn="ctr"/>
                       <a:r>
                         <a:rPr lang="es-ES" sz="1400" dirty="0"/>
-                        <a:t>1</a:t>
+                        <a:t>0,46</a:t>
                       </a:r>
                     </a:p>
                   </a:txBody>
@@ -6976,7 +6777,7 @@
                       <a:pPr algn="ctr"/>
                       <a:r>
                         <a:rPr lang="es-ES" sz="1400" dirty="0"/>
-                        <a:t>0,25</a:t>
+                        <a:t>0,81</a:t>
                       </a:r>
                     </a:p>
                   </a:txBody>
@@ -6997,7 +6798,7 @@
                       <a:pPr algn="ctr"/>
                       <a:r>
                         <a:rPr lang="es-ES" sz="1400" dirty="0"/>
-                        <a:t>0,70</a:t>
+                        <a:t>0,73</a:t>
                       </a:r>
                     </a:p>
                   </a:txBody>
@@ -7018,7 +6819,7 @@
                       <a:pPr algn="ctr"/>
                       <a:r>
                         <a:rPr lang="es-ES" sz="1400" dirty="0"/>
-                        <a:t>0,81</a:t>
+                        <a:t>0,91</a:t>
                       </a:r>
                     </a:p>
                   </a:txBody>
@@ -7038,16 +6839,13 @@
                     <a:p>
                       <a:r>
                         <a:rPr lang="es-ES" sz="1400" dirty="0"/>
-                        <a:t>Ligeramente mejor </a:t>
-                      </a:r>
-                      <a:r>
-                        <a:rPr lang="es-ES" sz="1400" i="1" u="none" dirty="0"/>
-                        <a:t>recall</a:t>
-                      </a:r>
-                      <a:r>
-                        <a:rPr lang="es-ES" sz="1400" dirty="0"/>
-                        <a:t> de “Yes”, pero aporte mínimo de SMOTE</a:t>
-                      </a:r>
+                        <a:t>Sin cambios respecto a </a:t>
+                      </a:r>
+                      <a:r>
+                        <a:rPr lang="es-ES" sz="1400" dirty="0" err="1"/>
+                        <a:t>Baseline</a:t>
+                      </a:r>
+                      <a:endParaRPr lang="es-ES" sz="1400" dirty="0"/>
                     </a:p>
                   </a:txBody>
                   <a:tcPr>
@@ -7389,7 +7187,7 @@
             </a:r>
             <a:r>
               <a:rPr lang="es-ES" sz="1600" dirty="0"/>
-              <a:t>Mejora ligeramente el </a:t>
+              <a:t>Mejora marginal el </a:t>
             </a:r>
             <a:r>
               <a:rPr lang="es-ES" sz="1600" i="1" dirty="0"/>
@@ -7928,7 +7726,7 @@
           <p:nvPr>
             <p:extLst>
               <p:ext uri="{D42A27DB-BD31-4B8C-83A1-F6EECF244321}">
-                <p14:modId xmlns:p14="http://schemas.microsoft.com/office/powerpoint/2010/main" val="3003026618"/>
+                <p14:modId xmlns:p14="http://schemas.microsoft.com/office/powerpoint/2010/main" val="550112260"/>
               </p:ext>
             </p:extLst>
           </p:nvPr>
@@ -8233,7 +8031,7 @@
                     <a:p>
                       <a:r>
                         <a:rPr lang="es-ES" sz="1200" dirty="0"/>
-                        <a:t>3,12</a:t>
+                        <a:t>3,10</a:t>
                       </a:r>
                     </a:p>
                   </a:txBody>
@@ -8246,7 +8044,7 @@
                     <a:p>
                       <a:r>
                         <a:rPr lang="es-ES" sz="1200" dirty="0"/>
-                        <a:t>5,18</a:t>
+                        <a:t>5,14</a:t>
                       </a:r>
                     </a:p>
                   </a:txBody>
@@ -8385,18 +8183,9 @@
                     <a:lstStyle/>
                     <a:p>
                       <a:r>
-                        <a:rPr lang="es-ES" sz="1200" dirty="0" err="1"/>
-                        <a:t>Regresion</a:t>
-                      </a:r>
-                      <a:r>
                         <a:rPr lang="es-ES" sz="1200" dirty="0"/>
-                        <a:t> </a:t>
-                      </a:r>
-                      <a:r>
-                        <a:rPr lang="es-ES" sz="1200" dirty="0" err="1"/>
-                        <a:t>Lienal</a:t>
-                      </a:r>
-                      <a:endParaRPr lang="es-ES" sz="1200" dirty="0"/>
+                        <a:t>Regresión Lineal</a:t>
+                      </a:r>
                     </a:p>
                   </a:txBody>
                   <a:tcPr/>
@@ -8407,10 +8196,9 @@
                     <a:lstStyle/>
                     <a:p>
                       <a:r>
-                        <a:rPr lang="es-ES" sz="1200" dirty="0" err="1"/>
-                        <a:t>Logaritmica</a:t>
-                      </a:r>
-                      <a:endParaRPr lang="es-ES" sz="1200" dirty="0"/>
+                        <a:rPr lang="es-ES" sz="1200" dirty="0"/>
+                        <a:t>Logarítmica</a:t>
+                      </a:r>
                     </a:p>
                   </a:txBody>
                   <a:tcPr/>
@@ -8498,10 +8286,9 @@
                     <a:lstStyle/>
                     <a:p>
                       <a:r>
-                        <a:rPr lang="es-ES" sz="1200" dirty="0" err="1"/>
-                        <a:t>Logaritmica</a:t>
-                      </a:r>
-                      <a:endParaRPr lang="es-ES" sz="1200" dirty="0"/>
+                        <a:rPr lang="es-ES" sz="1200" dirty="0"/>
+                        <a:t>Logarítmica</a:t>
+                      </a:r>
                     </a:p>
                   </a:txBody>
                   <a:tcPr/>
@@ -8593,10 +8380,9 @@
                     <a:lstStyle/>
                     <a:p>
                       <a:r>
-                        <a:rPr lang="es-ES" sz="1200" dirty="0" err="1"/>
-                        <a:t>Logaritmica</a:t>
-                      </a:r>
-                      <a:endParaRPr lang="es-ES" sz="1200" dirty="0"/>
+                        <a:rPr lang="es-ES" sz="1200" dirty="0"/>
+                        <a:t>Logarítmica</a:t>
+                      </a:r>
                     </a:p>
                   </a:txBody>
                   <a:tcPr/>
@@ -9803,7 +9589,7 @@
           <p:nvPr>
             <p:extLst>
               <p:ext uri="{D42A27DB-BD31-4B8C-83A1-F6EECF244321}">
-                <p14:modId xmlns:p14="http://schemas.microsoft.com/office/powerpoint/2010/main" val="757759632"/>
+                <p14:modId xmlns:p14="http://schemas.microsoft.com/office/powerpoint/2010/main" val="2883647464"/>
               </p:ext>
             </p:extLst>
           </p:nvPr>
@@ -10198,19 +9984,11 @@
                       </a:r>
                       <a:r>
                         <a:rPr lang="es-ES" sz="1400" dirty="0"/>
-                        <a:t> </a:t>
+                        <a:t> Forest </a:t>
                       </a:r>
                       <a:r>
                         <a:rPr lang="es-ES" sz="1400" dirty="0" err="1"/>
-                        <a:t>fores</a:t>
-                      </a:r>
-                      <a:r>
-                        <a:rPr lang="es-ES" sz="1400" dirty="0"/>
-                        <a:t> </a:t>
-                      </a:r>
-                      <a:r>
-                        <a:rPr lang="es-ES" sz="1400" dirty="0" err="1"/>
-                        <a:t>grid</a:t>
+                        <a:t>Grid</a:t>
                       </a:r>
                       <a:r>
                         <a:rPr lang="es-ES" sz="1400" dirty="0"/>
@@ -16852,7 +16630,7 @@
           <p:nvPr>
             <p:extLst>
               <p:ext uri="{D42A27DB-BD31-4B8C-83A1-F6EECF244321}">
-                <p14:modId xmlns:p14="http://schemas.microsoft.com/office/powerpoint/2010/main" val="1063426724"/>
+                <p14:modId xmlns:p14="http://schemas.microsoft.com/office/powerpoint/2010/main" val="485724409"/>
               </p:ext>
             </p:extLst>
           </p:nvPr>
@@ -17122,7 +16900,7 @@
                       <a:pPr algn="ctr"/>
                       <a:r>
                         <a:rPr lang="es-ES" sz="1400" dirty="0"/>
-                        <a:t>0,86</a:t>
+                        <a:t>0,85</a:t>
                       </a:r>
                     </a:p>
                   </a:txBody>
@@ -17244,7 +17022,7 @@
                       <a:pPr algn="ctr"/>
                       <a:r>
                         <a:rPr lang="es-ES" sz="1400" dirty="0"/>
-                        <a:t>0,85</a:t>
+                        <a:t>0,84</a:t>
                       </a:r>
                     </a:p>
                   </a:txBody>
@@ -17300,7 +17078,7 @@
                       <a:pPr algn="ctr"/>
                       <a:r>
                         <a:rPr lang="es-ES" sz="1400" dirty="0"/>
-                        <a:t>0,785</a:t>
+                        <a:t>0,7847</a:t>
                       </a:r>
                     </a:p>
                   </a:txBody>
@@ -17389,6 +17167,20 @@
                       <a:pPr algn="ctr"/>
                       <a:r>
                         <a:rPr lang="es-ES" sz="1400" dirty="0"/>
+                        <a:t>0,17</a:t>
+                      </a:r>
+                    </a:p>
+                  </a:txBody>
+                  <a:tcPr/>
+                </a:tc>
+                <a:tc>
+                  <a:txBody>
+                    <a:bodyPr/>
+                    <a:lstStyle/>
+                    <a:p>
+                      <a:pPr algn="ctr"/>
+                      <a:r>
+                        <a:rPr lang="es-ES" sz="1400" dirty="0"/>
                         <a:t>0,13</a:t>
                       </a:r>
                     </a:p>
@@ -17403,21 +17195,7 @@
                       <a:pPr algn="ctr"/>
                       <a:r>
                         <a:rPr lang="es-ES" sz="1400" dirty="0"/>
-                        <a:t>0,12</a:t>
-                      </a:r>
-                    </a:p>
-                  </a:txBody>
-                  <a:tcPr/>
-                </a:tc>
-                <a:tc>
-                  <a:txBody>
-                    <a:bodyPr/>
-                    <a:lstStyle/>
-                    <a:p>
-                      <a:pPr algn="ctr"/>
-                      <a:r>
-                        <a:rPr lang="es-ES" sz="1400" dirty="0"/>
-                        <a:t>0,789</a:t>
+                        <a:t>0,7886</a:t>
                       </a:r>
                     </a:p>
                   </a:txBody>
@@ -17465,7 +17243,7 @@
                       <a:pPr algn="ctr"/>
                       <a:r>
                         <a:rPr lang="es-ES" sz="1400" dirty="0"/>
-                        <a:t>0,700</a:t>
+                        <a:t>0,702</a:t>
                       </a:r>
                     </a:p>
                   </a:txBody>
@@ -17479,7 +17257,7 @@
                       <a:pPr algn="ctr"/>
                       <a:r>
                         <a:rPr lang="es-ES" sz="1400" dirty="0"/>
-                        <a:t>0,87</a:t>
+                        <a:t>0,78</a:t>
                       </a:r>
                     </a:p>
                   </a:txBody>
@@ -17535,7 +17313,7 @@
                       <a:pPr algn="ctr"/>
                       <a:r>
                         <a:rPr lang="es-ES" sz="1400" dirty="0"/>
-                        <a:t>0,800</a:t>
+                        <a:t>0,801</a:t>
                       </a:r>
                     </a:p>
                   </a:txBody>
@@ -17591,7 +17369,7 @@
                       <a:pPr algn="ctr"/>
                       <a:r>
                         <a:rPr lang="es-ES" sz="1400" dirty="0"/>
-                        <a:t>0,720</a:t>
+                        <a:t>0,718</a:t>
                       </a:r>
                     </a:p>
                   </a:txBody>
@@ -17605,7 +17383,7 @@
                       <a:pPr algn="ctr"/>
                       <a:r>
                         <a:rPr lang="es-ES" sz="1400" dirty="0"/>
-                        <a:t>0,77</a:t>
+                        <a:t>0,80</a:t>
                       </a:r>
                     </a:p>
                   </a:txBody>
